--- a/AzureML_Project/ShirmilaHewappathirana_CC_Project_Vshared.pptx
+++ b/AzureML_Project/ShirmilaHewappathirana_CC_Project_Vshared.pptx
@@ -232,7 +232,7 @@
           <a:p>
             <a:fld id="{218EF07C-512F-47B2-AA3D-17C795D43972}" type="datetimeFigureOut">
               <a:rPr lang="en-CA" smtClean="0"/>
-              <a:t>2025-05-13</a:t>
+              <a:t>2025-09-17</a:t>
             </a:fld>
             <a:endParaRPr lang="en-CA"/>
           </a:p>
@@ -649,7 +649,7 @@
           <a:p>
             <a:fld id="{D69F77DD-C69D-44F9-80E9-D8E458541C1B}" type="datetimeFigureOut">
               <a:rPr lang="en-CA" smtClean="0"/>
-              <a:t>2025-05-13</a:t>
+              <a:t>2025-09-17</a:t>
             </a:fld>
             <a:endParaRPr lang="en-CA"/>
           </a:p>
@@ -849,7 +849,7 @@
           <a:p>
             <a:fld id="{D69F77DD-C69D-44F9-80E9-D8E458541C1B}" type="datetimeFigureOut">
               <a:rPr lang="en-CA" smtClean="0"/>
-              <a:t>2025-05-13</a:t>
+              <a:t>2025-09-17</a:t>
             </a:fld>
             <a:endParaRPr lang="en-CA"/>
           </a:p>
@@ -1059,7 +1059,7 @@
           <a:p>
             <a:fld id="{D69F77DD-C69D-44F9-80E9-D8E458541C1B}" type="datetimeFigureOut">
               <a:rPr lang="en-CA" smtClean="0"/>
-              <a:t>2025-05-13</a:t>
+              <a:t>2025-09-17</a:t>
             </a:fld>
             <a:endParaRPr lang="en-CA"/>
           </a:p>
@@ -1259,7 +1259,7 @@
           <a:p>
             <a:fld id="{D69F77DD-C69D-44F9-80E9-D8E458541C1B}" type="datetimeFigureOut">
               <a:rPr lang="en-CA" smtClean="0"/>
-              <a:t>2025-05-13</a:t>
+              <a:t>2025-09-17</a:t>
             </a:fld>
             <a:endParaRPr lang="en-CA"/>
           </a:p>
@@ -1535,7 +1535,7 @@
           <a:p>
             <a:fld id="{D69F77DD-C69D-44F9-80E9-D8E458541C1B}" type="datetimeFigureOut">
               <a:rPr lang="en-CA" smtClean="0"/>
-              <a:t>2025-05-13</a:t>
+              <a:t>2025-09-17</a:t>
             </a:fld>
             <a:endParaRPr lang="en-CA"/>
           </a:p>
@@ -1803,7 +1803,7 @@
           <a:p>
             <a:fld id="{D69F77DD-C69D-44F9-80E9-D8E458541C1B}" type="datetimeFigureOut">
               <a:rPr lang="en-CA" smtClean="0"/>
-              <a:t>2025-05-13</a:t>
+              <a:t>2025-09-17</a:t>
             </a:fld>
             <a:endParaRPr lang="en-CA"/>
           </a:p>
@@ -2218,7 +2218,7 @@
           <a:p>
             <a:fld id="{D69F77DD-C69D-44F9-80E9-D8E458541C1B}" type="datetimeFigureOut">
               <a:rPr lang="en-CA" smtClean="0"/>
-              <a:t>2025-05-13</a:t>
+              <a:t>2025-09-17</a:t>
             </a:fld>
             <a:endParaRPr lang="en-CA"/>
           </a:p>
@@ -2360,7 +2360,7 @@
           <a:p>
             <a:fld id="{D69F77DD-C69D-44F9-80E9-D8E458541C1B}" type="datetimeFigureOut">
               <a:rPr lang="en-CA" smtClean="0"/>
-              <a:t>2025-05-13</a:t>
+              <a:t>2025-09-17</a:t>
             </a:fld>
             <a:endParaRPr lang="en-CA"/>
           </a:p>
@@ -2473,7 +2473,7 @@
           <a:p>
             <a:fld id="{D69F77DD-C69D-44F9-80E9-D8E458541C1B}" type="datetimeFigureOut">
               <a:rPr lang="en-CA" smtClean="0"/>
-              <a:t>2025-05-13</a:t>
+              <a:t>2025-09-17</a:t>
             </a:fld>
             <a:endParaRPr lang="en-CA"/>
           </a:p>
@@ -2786,7 +2786,7 @@
           <a:p>
             <a:fld id="{D69F77DD-C69D-44F9-80E9-D8E458541C1B}" type="datetimeFigureOut">
               <a:rPr lang="en-CA" smtClean="0"/>
-              <a:t>2025-05-13</a:t>
+              <a:t>2025-09-17</a:t>
             </a:fld>
             <a:endParaRPr lang="en-CA"/>
           </a:p>
@@ -3075,7 +3075,7 @@
           <a:p>
             <a:fld id="{D69F77DD-C69D-44F9-80E9-D8E458541C1B}" type="datetimeFigureOut">
               <a:rPr lang="en-CA" smtClean="0"/>
-              <a:t>2025-05-13</a:t>
+              <a:t>2025-09-17</a:t>
             </a:fld>
             <a:endParaRPr lang="en-CA"/>
           </a:p>
@@ -3318,7 +3318,7 @@
           <a:p>
             <a:fld id="{D69F77DD-C69D-44F9-80E9-D8E458541C1B}" type="datetimeFigureOut">
               <a:rPr lang="en-CA" smtClean="0"/>
-              <a:t>2025-05-13</a:t>
+              <a:t>2025-09-17</a:t>
             </a:fld>
             <a:endParaRPr lang="en-CA"/>
           </a:p>
